--- a/dist/초2/수학/도형과측정/초2_수학_도형과측정_03_길이재기.pptx
+++ b/dist/초2/수학/도형과측정/초2_수학_도형과측정_03_길이재기.pptx
@@ -122,13 +122,13 @@
   <p:extLst>
     <p:ext uri="{521415D9-36F7-43E2-AB2F-B90AF26B5E84}">
       <p14:sectionLst xmlns:p14="http://schemas.microsoft.com/office/powerpoint/2010/main">
-        <p14:section name="도입" id="{0069fddb-ed5d-0e5b-435f-931140206f4a}">
+        <p14:section name="도입" id="{ce98bdc2-8c75-72c3-82bb-e23c9c3ff663}">
           <p14:sldIdLst>
             <p14:sldId id="256"/>
             <p14:sldId id="257"/>
           </p14:sldIdLst>
         </p14:section>
-        <p14:section name="개념" id="{60f8c263-f5c9-4b1b-5119-7ebf38a2e55a}">
+        <p14:section name="개념" id="{67367c03-d018-b96f-6a39-4aa2bbb8946c}">
           <p14:sldIdLst>
             <p14:sldId id="258"/>
             <p14:sldId id="259"/>
@@ -138,32 +138,32 @@
             <p14:sldId id="265"/>
           </p14:sldIdLst>
         </p14:section>
-        <p14:section name="연습" id="{42ef3056-f4f1-1d92-8db5-f60fecf408a9}">
+        <p14:section name="연습" id="{c948ceca-d39d-0bcc-9b84-6562e7361cd6}">
           <p14:sldIdLst>
             <p14:sldId id="262"/>
             <p14:sldId id="263"/>
             <p14:sldId id="266"/>
           </p14:sldIdLst>
         </p14:section>
-        <p14:section name="개념" id="{4f03f04a-f44a-6426-8564-8ef6fae1261f}">
+        <p14:section name="개념" id="{deccc6b7-b706-71a0-6bc0-b37fa839ff8e}">
           <p14:sldIdLst/>
         </p14:section>
-        <p14:section name="연습" id="{d31b13f9-e878-b3bf-a489-051710102535}">
+        <p14:section name="연습" id="{37d80f2c-b18c-1ecc-7ce6-96baf2529817}">
           <p14:sldIdLst/>
         </p14:section>
-        <p14:section name="확인" id="{1799f2e5-ae0f-fb9f-3f19-4111c3d3d799}">
+        <p14:section name="확인" id="{321e7411-33ee-b241-b8de-baf29ba1e5b1}">
           <p14:sldIdLst>
             <p14:sldId id="267"/>
             <p14:sldId id="268"/>
             <p14:sldId id="269"/>
           </p14:sldIdLst>
         </p14:section>
-        <p14:section name="정리" id="{28abbbc2-f5be-bd48-742a-6f80a1a06ba4}">
+        <p14:section name="정리" id="{2bbdaf10-db20-0a1c-992f-5a4e39efcf01}">
           <p14:sldIdLst>
             <p14:sldId id="270"/>
           </p14:sldIdLst>
         </p14:section>
-        <p14:section name="보충" id="{32195cff-0b20-c42e-187f-9483379ad305}">
+        <p14:section name="보충" id="{3bbcac1b-ce23-0624-5fbb-26696126b191}">
           <p14:sldIdLst>
             <p14:sldId id="271"/>
           </p14:sldIdLst>
@@ -4492,7 +4492,7 @@
         </p:nvSpPr>
         <p:spPr>
           <a:xfrm>
-            <a:off x="548640" y="1773936"/>
+            <a:off x="548640" y="1945386"/>
             <a:ext cx="566928" cy="566928"/>
           </a:xfrm>
           <a:prstGeom prst="roundRect">
@@ -4539,8 +4539,8 @@
         </p:nvSpPr>
         <p:spPr>
           <a:xfrm>
-            <a:off x="1481328" y="2159000"/>
-            <a:ext cx="3931920" cy="0"/>
+            <a:off x="1481328" y="2445563"/>
+            <a:ext cx="4293108" cy="0"/>
           </a:xfrm>
           <a:prstGeom prst="line">
             <a:avLst/>
@@ -4564,7 +4564,7 @@
         </p:nvSpPr>
         <p:spPr>
           <a:xfrm>
-            <a:off x="1755648" y="2012696"/>
+            <a:off x="1755648" y="2299259"/>
             <a:ext cx="0" cy="292608"/>
           </a:xfrm>
           <a:prstGeom prst="line">
@@ -4587,7 +4587,7 @@
         </p:nvSpPr>
         <p:spPr>
           <a:xfrm>
-            <a:off x="1298448" y="2341880"/>
+            <a:off x="1298448" y="2628443"/>
             <a:ext cx="914400" cy="264160"/>
           </a:xfrm>
           <a:prstGeom prst="rect">
@@ -4626,7 +4626,7 @@
         </p:nvSpPr>
         <p:spPr>
           <a:xfrm>
-            <a:off x="2093976" y="2012696"/>
+            <a:off x="2130095" y="2299259"/>
             <a:ext cx="0" cy="292608"/>
           </a:xfrm>
           <a:prstGeom prst="line">
@@ -4649,7 +4649,7 @@
         </p:nvSpPr>
         <p:spPr>
           <a:xfrm>
-            <a:off x="1636776" y="2341880"/>
+            <a:off x="1672895" y="2628443"/>
             <a:ext cx="914400" cy="264160"/>
           </a:xfrm>
           <a:prstGeom prst="rect">
@@ -4688,7 +4688,7 @@
         </p:nvSpPr>
         <p:spPr>
           <a:xfrm>
-            <a:off x="2432304" y="2012696"/>
+            <a:off x="2504542" y="2299259"/>
             <a:ext cx="0" cy="292608"/>
           </a:xfrm>
           <a:prstGeom prst="line">
@@ -4711,7 +4711,7 @@
         </p:nvSpPr>
         <p:spPr>
           <a:xfrm>
-            <a:off x="1975104" y="2341880"/>
+            <a:off x="2047342" y="2628443"/>
             <a:ext cx="914400" cy="264160"/>
           </a:xfrm>
           <a:prstGeom prst="rect">
@@ -4750,7 +4750,7 @@
         </p:nvSpPr>
         <p:spPr>
           <a:xfrm>
-            <a:off x="2770632" y="2012696"/>
+            <a:off x="2878988" y="2299259"/>
             <a:ext cx="0" cy="292608"/>
           </a:xfrm>
           <a:prstGeom prst="line">
@@ -4773,7 +4773,7 @@
         </p:nvSpPr>
         <p:spPr>
           <a:xfrm>
-            <a:off x="2313432" y="2341880"/>
+            <a:off x="2421788" y="2628443"/>
             <a:ext cx="914400" cy="264160"/>
           </a:xfrm>
           <a:prstGeom prst="rect">
@@ -4812,7 +4812,7 @@
         </p:nvSpPr>
         <p:spPr>
           <a:xfrm>
-            <a:off x="3108960" y="2012696"/>
+            <a:off x="3253435" y="2299259"/>
             <a:ext cx="0" cy="292608"/>
           </a:xfrm>
           <a:prstGeom prst="line">
@@ -4835,7 +4835,7 @@
         </p:nvSpPr>
         <p:spPr>
           <a:xfrm>
-            <a:off x="2651760" y="2341880"/>
+            <a:off x="2796235" y="2628443"/>
             <a:ext cx="914400" cy="264160"/>
           </a:xfrm>
           <a:prstGeom prst="rect">
@@ -4874,7 +4874,7 @@
         </p:nvSpPr>
         <p:spPr>
           <a:xfrm>
-            <a:off x="3447288" y="2012696"/>
+            <a:off x="3627882" y="2299259"/>
             <a:ext cx="0" cy="292608"/>
           </a:xfrm>
           <a:prstGeom prst="line">
@@ -4897,7 +4897,7 @@
         </p:nvSpPr>
         <p:spPr>
           <a:xfrm>
-            <a:off x="2990088" y="2341880"/>
+            <a:off x="3170682" y="2628443"/>
             <a:ext cx="914400" cy="264160"/>
           </a:xfrm>
           <a:prstGeom prst="rect">
@@ -4936,7 +4936,7 @@
         </p:nvSpPr>
         <p:spPr>
           <a:xfrm>
-            <a:off x="3785616" y="2012696"/>
+            <a:off x="4002329" y="2299259"/>
             <a:ext cx="0" cy="292608"/>
           </a:xfrm>
           <a:prstGeom prst="line">
@@ -4959,7 +4959,7 @@
         </p:nvSpPr>
         <p:spPr>
           <a:xfrm>
-            <a:off x="3328416" y="2341880"/>
+            <a:off x="3545129" y="2628443"/>
             <a:ext cx="914400" cy="264160"/>
           </a:xfrm>
           <a:prstGeom prst="rect">
@@ -4998,7 +4998,7 @@
         </p:nvSpPr>
         <p:spPr>
           <a:xfrm>
-            <a:off x="4123944" y="2012696"/>
+            <a:off x="4376776" y="2299259"/>
             <a:ext cx="0" cy="292608"/>
           </a:xfrm>
           <a:prstGeom prst="line">
@@ -5021,7 +5021,7 @@
         </p:nvSpPr>
         <p:spPr>
           <a:xfrm>
-            <a:off x="3666744" y="2341880"/>
+            <a:off x="3919576" y="2628443"/>
             <a:ext cx="914400" cy="264160"/>
           </a:xfrm>
           <a:prstGeom prst="rect">
@@ -5060,7 +5060,7 @@
         </p:nvSpPr>
         <p:spPr>
           <a:xfrm>
-            <a:off x="4462272" y="2012696"/>
+            <a:off x="4751222" y="2299259"/>
             <a:ext cx="0" cy="292608"/>
           </a:xfrm>
           <a:prstGeom prst="line">
@@ -5083,7 +5083,7 @@
         </p:nvSpPr>
         <p:spPr>
           <a:xfrm>
-            <a:off x="4005072" y="2341880"/>
+            <a:off x="4294022" y="2628443"/>
             <a:ext cx="914400" cy="264160"/>
           </a:xfrm>
           <a:prstGeom prst="rect">
@@ -5122,7 +5122,7 @@
         </p:nvSpPr>
         <p:spPr>
           <a:xfrm>
-            <a:off x="4800600" y="2012696"/>
+            <a:off x="5125669" y="2299259"/>
             <a:ext cx="0" cy="292608"/>
           </a:xfrm>
           <a:prstGeom prst="line">
@@ -5145,7 +5145,7 @@
         </p:nvSpPr>
         <p:spPr>
           <a:xfrm>
-            <a:off x="4343400" y="2341880"/>
+            <a:off x="4668469" y="2628443"/>
             <a:ext cx="914400" cy="264160"/>
           </a:xfrm>
           <a:prstGeom prst="rect">
@@ -5184,7 +5184,7 @@
         </p:nvSpPr>
         <p:spPr>
           <a:xfrm>
-            <a:off x="5138928" y="2012696"/>
+            <a:off x="5500116" y="2299259"/>
             <a:ext cx="0" cy="292608"/>
           </a:xfrm>
           <a:prstGeom prst="line">
@@ -5207,7 +5207,7 @@
         </p:nvSpPr>
         <p:spPr>
           <a:xfrm>
-            <a:off x="4681728" y="2341880"/>
+            <a:off x="5042916" y="2628443"/>
             <a:ext cx="914400" cy="264160"/>
           </a:xfrm>
           <a:prstGeom prst="rect">
@@ -5246,7 +5246,7 @@
         </p:nvSpPr>
         <p:spPr>
           <a:xfrm>
-            <a:off x="1664208" y="2067560"/>
+            <a:off x="1664208" y="2354123"/>
             <a:ext cx="182880" cy="182880"/>
           </a:xfrm>
           <a:prstGeom prst="ellipse">
@@ -5271,7 +5271,7 @@
         </p:nvSpPr>
         <p:spPr>
           <a:xfrm>
-            <a:off x="3085186" y="2067560"/>
+            <a:off x="3236885" y="2354123"/>
             <a:ext cx="182880" cy="182880"/>
           </a:xfrm>
           <a:prstGeom prst="ellipse">
@@ -5296,7 +5296,7 @@
         </p:nvSpPr>
         <p:spPr>
           <a:xfrm flipV="1">
-            <a:off x="1755648" y="1774952"/>
+            <a:off x="1755648" y="2061515"/>
             <a:ext cx="0" cy="338328"/>
           </a:xfrm>
           <a:prstGeom prst="line">
@@ -5319,8 +5319,8 @@
         </p:nvSpPr>
         <p:spPr>
           <a:xfrm>
-            <a:off x="1755648" y="1774952"/>
-            <a:ext cx="1420978" cy="0"/>
+            <a:off x="1755648" y="2061515"/>
+            <a:ext cx="1572677" cy="0"/>
           </a:xfrm>
           <a:prstGeom prst="line">
             <a:avLst/>
@@ -5343,8 +5343,8 @@
         </p:nvSpPr>
         <p:spPr>
           <a:xfrm>
-            <a:off x="1755648" y="1492504"/>
-            <a:ext cx="1420978" cy="264160"/>
+            <a:off x="1755648" y="1779067"/>
+            <a:ext cx="1572677" cy="264160"/>
           </a:xfrm>
           <a:prstGeom prst="rect">
             <a:avLst/>
@@ -5382,8 +5382,8 @@
         </p:nvSpPr>
         <p:spPr>
           <a:xfrm>
-            <a:off x="1481328" y="1976120"/>
-            <a:ext cx="3931920" cy="365760"/>
+            <a:off x="1481328" y="2262683"/>
+            <a:ext cx="4293108" cy="365760"/>
           </a:xfrm>
           <a:prstGeom prst="rect">
             <a:avLst/>
@@ -5411,7 +5411,7 @@
         </p:nvSpPr>
         <p:spPr>
           <a:xfrm>
-            <a:off x="6277356" y="1773936"/>
+            <a:off x="6277356" y="1945386"/>
             <a:ext cx="566928" cy="566928"/>
           </a:xfrm>
           <a:prstGeom prst="roundRect">
@@ -5458,8 +5458,8 @@
         </p:nvSpPr>
         <p:spPr>
           <a:xfrm>
-            <a:off x="7210044" y="2159000"/>
-            <a:ext cx="3931920" cy="0"/>
+            <a:off x="7210044" y="2445563"/>
+            <a:ext cx="4293108" cy="0"/>
           </a:xfrm>
           <a:prstGeom prst="line">
             <a:avLst/>
@@ -5483,7 +5483,7 @@
         </p:nvSpPr>
         <p:spPr>
           <a:xfrm>
-            <a:off x="7484364" y="2012696"/>
+            <a:off x="7484364" y="2299259"/>
             <a:ext cx="0" cy="292608"/>
           </a:xfrm>
           <a:prstGeom prst="line">
@@ -5506,7 +5506,7 @@
         </p:nvSpPr>
         <p:spPr>
           <a:xfrm>
-            <a:off x="7027164" y="2341880"/>
+            <a:off x="7027164" y="2628443"/>
             <a:ext cx="914400" cy="264160"/>
           </a:xfrm>
           <a:prstGeom prst="rect">
@@ -5545,7 +5545,7 @@
         </p:nvSpPr>
         <p:spPr>
           <a:xfrm>
-            <a:off x="7822692" y="2012696"/>
+            <a:off x="7858811" y="2299259"/>
             <a:ext cx="0" cy="292608"/>
           </a:xfrm>
           <a:prstGeom prst="line">
@@ -5568,7 +5568,7 @@
         </p:nvSpPr>
         <p:spPr>
           <a:xfrm>
-            <a:off x="7365492" y="2341880"/>
+            <a:off x="7401611" y="2628443"/>
             <a:ext cx="914400" cy="264160"/>
           </a:xfrm>
           <a:prstGeom prst="rect">
@@ -5607,7 +5607,7 @@
         </p:nvSpPr>
         <p:spPr>
           <a:xfrm>
-            <a:off x="8161020" y="2012696"/>
+            <a:off x="8233258" y="2299259"/>
             <a:ext cx="0" cy="292608"/>
           </a:xfrm>
           <a:prstGeom prst="line">
@@ -5630,7 +5630,7 @@
         </p:nvSpPr>
         <p:spPr>
           <a:xfrm>
-            <a:off x="7703820" y="2341880"/>
+            <a:off x="7776058" y="2628443"/>
             <a:ext cx="914400" cy="264160"/>
           </a:xfrm>
           <a:prstGeom prst="rect">
@@ -5669,7 +5669,7 @@
         </p:nvSpPr>
         <p:spPr>
           <a:xfrm>
-            <a:off x="8499348" y="2012696"/>
+            <a:off x="8607704" y="2299259"/>
             <a:ext cx="0" cy="292608"/>
           </a:xfrm>
           <a:prstGeom prst="line">
@@ -5692,7 +5692,7 @@
         </p:nvSpPr>
         <p:spPr>
           <a:xfrm>
-            <a:off x="8042148" y="2341880"/>
+            <a:off x="8150504" y="2628443"/>
             <a:ext cx="914400" cy="264160"/>
           </a:xfrm>
           <a:prstGeom prst="rect">
@@ -5731,7 +5731,7 @@
         </p:nvSpPr>
         <p:spPr>
           <a:xfrm>
-            <a:off x="8837676" y="2012696"/>
+            <a:off x="8982151" y="2299259"/>
             <a:ext cx="0" cy="292608"/>
           </a:xfrm>
           <a:prstGeom prst="line">
@@ -5754,7 +5754,7 @@
         </p:nvSpPr>
         <p:spPr>
           <a:xfrm>
-            <a:off x="8380476" y="2341880"/>
+            <a:off x="8524951" y="2628443"/>
             <a:ext cx="914400" cy="264160"/>
           </a:xfrm>
           <a:prstGeom prst="rect">
@@ -5793,7 +5793,7 @@
         </p:nvSpPr>
         <p:spPr>
           <a:xfrm>
-            <a:off x="9176004" y="2012696"/>
+            <a:off x="9356598" y="2299259"/>
             <a:ext cx="0" cy="292608"/>
           </a:xfrm>
           <a:prstGeom prst="line">
@@ -5816,7 +5816,7 @@
         </p:nvSpPr>
         <p:spPr>
           <a:xfrm>
-            <a:off x="8718804" y="2341880"/>
+            <a:off x="8899398" y="2628443"/>
             <a:ext cx="914400" cy="264160"/>
           </a:xfrm>
           <a:prstGeom prst="rect">
@@ -5855,7 +5855,7 @@
         </p:nvSpPr>
         <p:spPr>
           <a:xfrm>
-            <a:off x="9514332" y="2012696"/>
+            <a:off x="9731045" y="2299259"/>
             <a:ext cx="0" cy="292608"/>
           </a:xfrm>
           <a:prstGeom prst="line">
@@ -5878,7 +5878,7 @@
         </p:nvSpPr>
         <p:spPr>
           <a:xfrm>
-            <a:off x="9057132" y="2341880"/>
+            <a:off x="9273845" y="2628443"/>
             <a:ext cx="914400" cy="264160"/>
           </a:xfrm>
           <a:prstGeom prst="rect">
@@ -5917,7 +5917,7 @@
         </p:nvSpPr>
         <p:spPr>
           <a:xfrm>
-            <a:off x="9852660" y="2012696"/>
+            <a:off x="10105492" y="2299259"/>
             <a:ext cx="0" cy="292608"/>
           </a:xfrm>
           <a:prstGeom prst="line">
@@ -5940,7 +5940,7 @@
         </p:nvSpPr>
         <p:spPr>
           <a:xfrm>
-            <a:off x="9395460" y="2341880"/>
+            <a:off x="9648292" y="2628443"/>
             <a:ext cx="914400" cy="264160"/>
           </a:xfrm>
           <a:prstGeom prst="rect">
@@ -5979,7 +5979,7 @@
         </p:nvSpPr>
         <p:spPr>
           <a:xfrm>
-            <a:off x="10190988" y="2012696"/>
+            <a:off x="10479938" y="2299259"/>
             <a:ext cx="0" cy="292608"/>
           </a:xfrm>
           <a:prstGeom prst="line">
@@ -6002,7 +6002,7 @@
         </p:nvSpPr>
         <p:spPr>
           <a:xfrm>
-            <a:off x="9733788" y="2341880"/>
+            <a:off x="10022738" y="2628443"/>
             <a:ext cx="914400" cy="264160"/>
           </a:xfrm>
           <a:prstGeom prst="rect">
@@ -6041,7 +6041,7 @@
         </p:nvSpPr>
         <p:spPr>
           <a:xfrm>
-            <a:off x="10529316" y="2012696"/>
+            <a:off x="10854385" y="2299259"/>
             <a:ext cx="0" cy="292608"/>
           </a:xfrm>
           <a:prstGeom prst="line">
@@ -6064,7 +6064,7 @@
         </p:nvSpPr>
         <p:spPr>
           <a:xfrm>
-            <a:off x="10072116" y="2341880"/>
+            <a:off x="10397185" y="2628443"/>
             <a:ext cx="914400" cy="264160"/>
           </a:xfrm>
           <a:prstGeom prst="rect">
@@ -6103,7 +6103,7 @@
         </p:nvSpPr>
         <p:spPr>
           <a:xfrm>
-            <a:off x="10867644" y="2012696"/>
+            <a:off x="11228832" y="2299259"/>
             <a:ext cx="0" cy="292608"/>
           </a:xfrm>
           <a:prstGeom prst="line">
@@ -6126,7 +6126,7 @@
         </p:nvSpPr>
         <p:spPr>
           <a:xfrm>
-            <a:off x="10410444" y="2341880"/>
+            <a:off x="10771632" y="2628443"/>
             <a:ext cx="914400" cy="264160"/>
           </a:xfrm>
           <a:prstGeom prst="rect">
@@ -6165,7 +6165,7 @@
         </p:nvSpPr>
         <p:spPr>
           <a:xfrm>
-            <a:off x="7392924" y="2067560"/>
+            <a:off x="7392924" y="2354123"/>
             <a:ext cx="182880" cy="182880"/>
           </a:xfrm>
           <a:prstGeom prst="ellipse">
@@ -6190,7 +6190,7 @@
         </p:nvSpPr>
         <p:spPr>
           <a:xfrm>
-            <a:off x="9152230" y="2067560"/>
+            <a:off x="9340047" y="2354123"/>
             <a:ext cx="182880" cy="182880"/>
           </a:xfrm>
           <a:prstGeom prst="ellipse">
@@ -6215,7 +6215,7 @@
         </p:nvSpPr>
         <p:spPr>
           <a:xfrm flipV="1">
-            <a:off x="7484364" y="1774952"/>
+            <a:off x="7484364" y="2061515"/>
             <a:ext cx="0" cy="338328"/>
           </a:xfrm>
           <a:prstGeom prst="line">
@@ -6238,8 +6238,8 @@
         </p:nvSpPr>
         <p:spPr>
           <a:xfrm>
-            <a:off x="7484364" y="1774952"/>
-            <a:ext cx="1759306" cy="0"/>
+            <a:off x="7484364" y="2061515"/>
+            <a:ext cx="1947123" cy="0"/>
           </a:xfrm>
           <a:prstGeom prst="line">
             <a:avLst/>
@@ -6262,8 +6262,8 @@
         </p:nvSpPr>
         <p:spPr>
           <a:xfrm>
-            <a:off x="7484364" y="1492504"/>
-            <a:ext cx="1759306" cy="264160"/>
+            <a:off x="7484364" y="1779067"/>
+            <a:ext cx="1947123" cy="264160"/>
           </a:xfrm>
           <a:prstGeom prst="rect">
             <a:avLst/>
@@ -6301,8 +6301,8 @@
         </p:nvSpPr>
         <p:spPr>
           <a:xfrm>
-            <a:off x="7210044" y="1976120"/>
-            <a:ext cx="3931920" cy="365760"/>
+            <a:off x="7210044" y="2262683"/>
+            <a:ext cx="4293108" cy="365760"/>
           </a:xfrm>
           <a:prstGeom prst="rect">
             <a:avLst/>
@@ -6616,7 +6616,7 @@
         </p:nvSpPr>
         <p:spPr>
           <a:xfrm>
-            <a:off x="548640" y="1773936"/>
+            <a:off x="548640" y="2219706"/>
             <a:ext cx="566928" cy="566928"/>
           </a:xfrm>
           <a:prstGeom prst="roundRect">
@@ -6663,8 +6663,8 @@
         </p:nvSpPr>
         <p:spPr>
           <a:xfrm>
-            <a:off x="1481328" y="2159000"/>
-            <a:ext cx="3931920" cy="0"/>
+            <a:off x="1481328" y="2785720"/>
+            <a:ext cx="4293108" cy="0"/>
           </a:xfrm>
           <a:prstGeom prst="line">
             <a:avLst/>
@@ -6688,7 +6688,7 @@
         </p:nvSpPr>
         <p:spPr>
           <a:xfrm>
-            <a:off x="1755648" y="2012696"/>
+            <a:off x="1755648" y="2639416"/>
             <a:ext cx="0" cy="292608"/>
           </a:xfrm>
           <a:prstGeom prst="line">
@@ -6711,7 +6711,7 @@
         </p:nvSpPr>
         <p:spPr>
           <a:xfrm>
-            <a:off x="1298448" y="2341880"/>
+            <a:off x="1298448" y="2968600"/>
             <a:ext cx="914400" cy="264160"/>
           </a:xfrm>
           <a:prstGeom prst="rect">
@@ -6750,7 +6750,7 @@
         </p:nvSpPr>
         <p:spPr>
           <a:xfrm>
-            <a:off x="2093976" y="2012696"/>
+            <a:off x="2130095" y="2639416"/>
             <a:ext cx="0" cy="292608"/>
           </a:xfrm>
           <a:prstGeom prst="line">
@@ -6773,7 +6773,7 @@
         </p:nvSpPr>
         <p:spPr>
           <a:xfrm>
-            <a:off x="1636776" y="2341880"/>
+            <a:off x="1672895" y="2968600"/>
             <a:ext cx="914400" cy="264160"/>
           </a:xfrm>
           <a:prstGeom prst="rect">
@@ -6812,7 +6812,7 @@
         </p:nvSpPr>
         <p:spPr>
           <a:xfrm>
-            <a:off x="2432304" y="2012696"/>
+            <a:off x="2504542" y="2639416"/>
             <a:ext cx="0" cy="292608"/>
           </a:xfrm>
           <a:prstGeom prst="line">
@@ -6835,7 +6835,7 @@
         </p:nvSpPr>
         <p:spPr>
           <a:xfrm>
-            <a:off x="1975104" y="2341880"/>
+            <a:off x="2047342" y="2968600"/>
             <a:ext cx="914400" cy="264160"/>
           </a:xfrm>
           <a:prstGeom prst="rect">
@@ -6874,7 +6874,7 @@
         </p:nvSpPr>
         <p:spPr>
           <a:xfrm>
-            <a:off x="2770632" y="2012696"/>
+            <a:off x="2878988" y="2639416"/>
             <a:ext cx="0" cy="292608"/>
           </a:xfrm>
           <a:prstGeom prst="line">
@@ -6897,7 +6897,7 @@
         </p:nvSpPr>
         <p:spPr>
           <a:xfrm>
-            <a:off x="2313432" y="2341880"/>
+            <a:off x="2421788" y="2968600"/>
             <a:ext cx="914400" cy="264160"/>
           </a:xfrm>
           <a:prstGeom prst="rect">
@@ -6936,7 +6936,7 @@
         </p:nvSpPr>
         <p:spPr>
           <a:xfrm>
-            <a:off x="3108960" y="2012696"/>
+            <a:off x="3253435" y="2639416"/>
             <a:ext cx="0" cy="292608"/>
           </a:xfrm>
           <a:prstGeom prst="line">
@@ -6959,7 +6959,7 @@
         </p:nvSpPr>
         <p:spPr>
           <a:xfrm>
-            <a:off x="2651760" y="2341880"/>
+            <a:off x="2796235" y="2968600"/>
             <a:ext cx="914400" cy="264160"/>
           </a:xfrm>
           <a:prstGeom prst="rect">
@@ -6998,7 +6998,7 @@
         </p:nvSpPr>
         <p:spPr>
           <a:xfrm>
-            <a:off x="3447288" y="2012696"/>
+            <a:off x="3627882" y="2639416"/>
             <a:ext cx="0" cy="292608"/>
           </a:xfrm>
           <a:prstGeom prst="line">
@@ -7021,7 +7021,7 @@
         </p:nvSpPr>
         <p:spPr>
           <a:xfrm>
-            <a:off x="2990088" y="2341880"/>
+            <a:off x="3170682" y="2968600"/>
             <a:ext cx="914400" cy="264160"/>
           </a:xfrm>
           <a:prstGeom prst="rect">
@@ -7060,7 +7060,7 @@
         </p:nvSpPr>
         <p:spPr>
           <a:xfrm>
-            <a:off x="3785616" y="2012696"/>
+            <a:off x="4002329" y="2639416"/>
             <a:ext cx="0" cy="292608"/>
           </a:xfrm>
           <a:prstGeom prst="line">
@@ -7083,7 +7083,7 @@
         </p:nvSpPr>
         <p:spPr>
           <a:xfrm>
-            <a:off x="3328416" y="2341880"/>
+            <a:off x="3545129" y="2968600"/>
             <a:ext cx="914400" cy="264160"/>
           </a:xfrm>
           <a:prstGeom prst="rect">
@@ -7122,7 +7122,7 @@
         </p:nvSpPr>
         <p:spPr>
           <a:xfrm>
-            <a:off x="4123944" y="2012696"/>
+            <a:off x="4376776" y="2639416"/>
             <a:ext cx="0" cy="292608"/>
           </a:xfrm>
           <a:prstGeom prst="line">
@@ -7145,7 +7145,7 @@
         </p:nvSpPr>
         <p:spPr>
           <a:xfrm>
-            <a:off x="3666744" y="2341880"/>
+            <a:off x="3919576" y="2968600"/>
             <a:ext cx="914400" cy="264160"/>
           </a:xfrm>
           <a:prstGeom prst="rect">
@@ -7184,7 +7184,7 @@
         </p:nvSpPr>
         <p:spPr>
           <a:xfrm>
-            <a:off x="4462272" y="2012696"/>
+            <a:off x="4751222" y="2639416"/>
             <a:ext cx="0" cy="292608"/>
           </a:xfrm>
           <a:prstGeom prst="line">
@@ -7207,7 +7207,7 @@
         </p:nvSpPr>
         <p:spPr>
           <a:xfrm>
-            <a:off x="4005072" y="2341880"/>
+            <a:off x="4294022" y="2968600"/>
             <a:ext cx="914400" cy="264160"/>
           </a:xfrm>
           <a:prstGeom prst="rect">
@@ -7246,7 +7246,7 @@
         </p:nvSpPr>
         <p:spPr>
           <a:xfrm>
-            <a:off x="4800600" y="2012696"/>
+            <a:off x="5125669" y="2639416"/>
             <a:ext cx="0" cy="292608"/>
           </a:xfrm>
           <a:prstGeom prst="line">
@@ -7269,7 +7269,7 @@
         </p:nvSpPr>
         <p:spPr>
           <a:xfrm>
-            <a:off x="4343400" y="2341880"/>
+            <a:off x="4668469" y="2968600"/>
             <a:ext cx="914400" cy="264160"/>
           </a:xfrm>
           <a:prstGeom prst="rect">
@@ -7308,7 +7308,7 @@
         </p:nvSpPr>
         <p:spPr>
           <a:xfrm>
-            <a:off x="5138928" y="2012696"/>
+            <a:off x="5500116" y="2639416"/>
             <a:ext cx="0" cy="292608"/>
           </a:xfrm>
           <a:prstGeom prst="line">
@@ -7331,7 +7331,7 @@
         </p:nvSpPr>
         <p:spPr>
           <a:xfrm>
-            <a:off x="4681728" y="2341880"/>
+            <a:off x="5042916" y="2968600"/>
             <a:ext cx="914400" cy="264160"/>
           </a:xfrm>
           <a:prstGeom prst="rect">
@@ -7370,7 +7370,7 @@
         </p:nvSpPr>
         <p:spPr>
           <a:xfrm>
-            <a:off x="2340864" y="2067560"/>
+            <a:off x="2413102" y="2694280"/>
             <a:ext cx="182880" cy="182880"/>
           </a:xfrm>
           <a:prstGeom prst="ellipse">
@@ -7395,7 +7395,7 @@
         </p:nvSpPr>
         <p:spPr>
           <a:xfrm>
-            <a:off x="4370832" y="2067560"/>
+            <a:off x="4659782" y="2694280"/>
             <a:ext cx="182880" cy="182880"/>
           </a:xfrm>
           <a:prstGeom prst="ellipse">
@@ -7420,7 +7420,7 @@
         </p:nvSpPr>
         <p:spPr>
           <a:xfrm flipV="1">
-            <a:off x="2432304" y="1774952"/>
+            <a:off x="2504542" y="2401672"/>
             <a:ext cx="0" cy="338328"/>
           </a:xfrm>
           <a:prstGeom prst="line">
@@ -7443,8 +7443,8 @@
         </p:nvSpPr>
         <p:spPr>
           <a:xfrm>
-            <a:off x="2432304" y="1774952"/>
-            <a:ext cx="2029968" cy="0"/>
+            <a:off x="2504542" y="2401672"/>
+            <a:ext cx="2246681" cy="0"/>
           </a:xfrm>
           <a:prstGeom prst="line">
             <a:avLst/>
@@ -7467,8 +7467,8 @@
         </p:nvSpPr>
         <p:spPr>
           <a:xfrm>
-            <a:off x="2432304" y="1492504"/>
-            <a:ext cx="2029968" cy="264160"/>
+            <a:off x="2504542" y="2119224"/>
+            <a:ext cx="2246681" cy="264160"/>
           </a:xfrm>
           <a:prstGeom prst="rect">
             <a:avLst/>
@@ -7506,8 +7506,8 @@
         </p:nvSpPr>
         <p:spPr>
           <a:xfrm>
-            <a:off x="1481328" y="1976120"/>
-            <a:ext cx="3931920" cy="365760"/>
+            <a:off x="1481328" y="2602840"/>
+            <a:ext cx="4293108" cy="365760"/>
           </a:xfrm>
           <a:prstGeom prst="rect">
             <a:avLst/>
@@ -7535,7 +7535,7 @@
         </p:nvSpPr>
         <p:spPr>
           <a:xfrm>
-            <a:off x="6277356" y="1773936"/>
+            <a:off x="6277356" y="2219706"/>
             <a:ext cx="566928" cy="566928"/>
           </a:xfrm>
           <a:prstGeom prst="roundRect">
@@ -7582,8 +7582,8 @@
         </p:nvSpPr>
         <p:spPr>
           <a:xfrm>
-            <a:off x="7210044" y="2159000"/>
-            <a:ext cx="3931920" cy="0"/>
+            <a:off x="7210044" y="2785720"/>
+            <a:ext cx="4293108" cy="0"/>
           </a:xfrm>
           <a:prstGeom prst="line">
             <a:avLst/>
@@ -7607,7 +7607,7 @@
         </p:nvSpPr>
         <p:spPr>
           <a:xfrm>
-            <a:off x="7484364" y="2012696"/>
+            <a:off x="7484364" y="2639416"/>
             <a:ext cx="0" cy="292608"/>
           </a:xfrm>
           <a:prstGeom prst="line">
@@ -7630,7 +7630,7 @@
         </p:nvSpPr>
         <p:spPr>
           <a:xfrm>
-            <a:off x="7027164" y="2341880"/>
+            <a:off x="7027164" y="2968600"/>
             <a:ext cx="914400" cy="264160"/>
           </a:xfrm>
           <a:prstGeom prst="rect">
@@ -7669,7 +7669,7 @@
         </p:nvSpPr>
         <p:spPr>
           <a:xfrm>
-            <a:off x="7822692" y="2012696"/>
+            <a:off x="7858811" y="2639416"/>
             <a:ext cx="0" cy="292608"/>
           </a:xfrm>
           <a:prstGeom prst="line">
@@ -7692,7 +7692,7 @@
         </p:nvSpPr>
         <p:spPr>
           <a:xfrm>
-            <a:off x="7365492" y="2341880"/>
+            <a:off x="7401611" y="2968600"/>
             <a:ext cx="914400" cy="264160"/>
           </a:xfrm>
           <a:prstGeom prst="rect">
@@ -7731,7 +7731,7 @@
         </p:nvSpPr>
         <p:spPr>
           <a:xfrm>
-            <a:off x="8161020" y="2012696"/>
+            <a:off x="8233258" y="2639416"/>
             <a:ext cx="0" cy="292608"/>
           </a:xfrm>
           <a:prstGeom prst="line">
@@ -7754,7 +7754,7 @@
         </p:nvSpPr>
         <p:spPr>
           <a:xfrm>
-            <a:off x="7703820" y="2341880"/>
+            <a:off x="7776058" y="2968600"/>
             <a:ext cx="914400" cy="264160"/>
           </a:xfrm>
           <a:prstGeom prst="rect">
@@ -7793,7 +7793,7 @@
         </p:nvSpPr>
         <p:spPr>
           <a:xfrm>
-            <a:off x="8499348" y="2012696"/>
+            <a:off x="8607704" y="2639416"/>
             <a:ext cx="0" cy="292608"/>
           </a:xfrm>
           <a:prstGeom prst="line">
@@ -7816,7 +7816,7 @@
         </p:nvSpPr>
         <p:spPr>
           <a:xfrm>
-            <a:off x="8042148" y="2341880"/>
+            <a:off x="8150504" y="2968600"/>
             <a:ext cx="914400" cy="264160"/>
           </a:xfrm>
           <a:prstGeom prst="rect">
@@ -7855,7 +7855,7 @@
         </p:nvSpPr>
         <p:spPr>
           <a:xfrm>
-            <a:off x="8837676" y="2012696"/>
+            <a:off x="8982151" y="2639416"/>
             <a:ext cx="0" cy="292608"/>
           </a:xfrm>
           <a:prstGeom prst="line">
@@ -7878,7 +7878,7 @@
         </p:nvSpPr>
         <p:spPr>
           <a:xfrm>
-            <a:off x="8380476" y="2341880"/>
+            <a:off x="8524951" y="2968600"/>
             <a:ext cx="914400" cy="264160"/>
           </a:xfrm>
           <a:prstGeom prst="rect">
@@ -7917,7 +7917,7 @@
         </p:nvSpPr>
         <p:spPr>
           <a:xfrm>
-            <a:off x="9176004" y="2012696"/>
+            <a:off x="9356598" y="2639416"/>
             <a:ext cx="0" cy="292608"/>
           </a:xfrm>
           <a:prstGeom prst="line">
@@ -7940,7 +7940,7 @@
         </p:nvSpPr>
         <p:spPr>
           <a:xfrm>
-            <a:off x="8718804" y="2341880"/>
+            <a:off x="8899398" y="2968600"/>
             <a:ext cx="914400" cy="264160"/>
           </a:xfrm>
           <a:prstGeom prst="rect">
@@ -7979,7 +7979,7 @@
         </p:nvSpPr>
         <p:spPr>
           <a:xfrm>
-            <a:off x="9514332" y="2012696"/>
+            <a:off x="9731045" y="2639416"/>
             <a:ext cx="0" cy="292608"/>
           </a:xfrm>
           <a:prstGeom prst="line">
@@ -8002,7 +8002,7 @@
         </p:nvSpPr>
         <p:spPr>
           <a:xfrm>
-            <a:off x="9057132" y="2341880"/>
+            <a:off x="9273845" y="2968600"/>
             <a:ext cx="914400" cy="264160"/>
           </a:xfrm>
           <a:prstGeom prst="rect">
@@ -8041,7 +8041,7 @@
         </p:nvSpPr>
         <p:spPr>
           <a:xfrm>
-            <a:off x="9852660" y="2012696"/>
+            <a:off x="10105492" y="2639416"/>
             <a:ext cx="0" cy="292608"/>
           </a:xfrm>
           <a:prstGeom prst="line">
@@ -8064,7 +8064,7 @@
         </p:nvSpPr>
         <p:spPr>
           <a:xfrm>
-            <a:off x="9395460" y="2341880"/>
+            <a:off x="9648292" y="2968600"/>
             <a:ext cx="914400" cy="264160"/>
           </a:xfrm>
           <a:prstGeom prst="rect">
@@ -8103,7 +8103,7 @@
         </p:nvSpPr>
         <p:spPr>
           <a:xfrm>
-            <a:off x="10190988" y="2012696"/>
+            <a:off x="10479938" y="2639416"/>
             <a:ext cx="0" cy="292608"/>
           </a:xfrm>
           <a:prstGeom prst="line">
@@ -8126,7 +8126,7 @@
         </p:nvSpPr>
         <p:spPr>
           <a:xfrm>
-            <a:off x="9733788" y="2341880"/>
+            <a:off x="10022738" y="2968600"/>
             <a:ext cx="914400" cy="264160"/>
           </a:xfrm>
           <a:prstGeom prst="rect">
@@ -8165,7 +8165,7 @@
         </p:nvSpPr>
         <p:spPr>
           <a:xfrm>
-            <a:off x="10529316" y="2012696"/>
+            <a:off x="10854385" y="2639416"/>
             <a:ext cx="0" cy="292608"/>
           </a:xfrm>
           <a:prstGeom prst="line">
@@ -8188,7 +8188,7 @@
         </p:nvSpPr>
         <p:spPr>
           <a:xfrm>
-            <a:off x="10072116" y="2341880"/>
+            <a:off x="10397185" y="2968600"/>
             <a:ext cx="914400" cy="264160"/>
           </a:xfrm>
           <a:prstGeom prst="rect">
@@ -8227,7 +8227,7 @@
         </p:nvSpPr>
         <p:spPr>
           <a:xfrm>
-            <a:off x="10867644" y="2012696"/>
+            <a:off x="11228832" y="2639416"/>
             <a:ext cx="0" cy="292608"/>
           </a:xfrm>
           <a:prstGeom prst="line">
@@ -8250,7 +8250,7 @@
         </p:nvSpPr>
         <p:spPr>
           <a:xfrm>
-            <a:off x="10410444" y="2341880"/>
+            <a:off x="10771632" y="2968600"/>
             <a:ext cx="914400" cy="264160"/>
           </a:xfrm>
           <a:prstGeom prst="rect">
@@ -8289,7 +8289,7 @@
         </p:nvSpPr>
         <p:spPr>
           <a:xfrm>
-            <a:off x="7392924" y="2067560"/>
+            <a:off x="7392924" y="2694280"/>
             <a:ext cx="182880" cy="182880"/>
           </a:xfrm>
           <a:prstGeom prst="ellipse">
@@ -8314,7 +8314,7 @@
         </p:nvSpPr>
         <p:spPr>
           <a:xfrm>
-            <a:off x="10404043" y="2067560"/>
+            <a:off x="10725501" y="2694280"/>
             <a:ext cx="182880" cy="182880"/>
           </a:xfrm>
           <a:prstGeom prst="ellipse">
@@ -8339,7 +8339,7 @@
         </p:nvSpPr>
         <p:spPr>
           <a:xfrm flipV="1">
-            <a:off x="7484364" y="1774952"/>
+            <a:off x="7484364" y="2401672"/>
             <a:ext cx="0" cy="338328"/>
           </a:xfrm>
           <a:prstGeom prst="line">
@@ -8362,8 +8362,8 @@
         </p:nvSpPr>
         <p:spPr>
           <a:xfrm>
-            <a:off x="7484364" y="1774952"/>
-            <a:ext cx="3011119" cy="0"/>
+            <a:off x="7484364" y="2401672"/>
+            <a:ext cx="3332577" cy="0"/>
           </a:xfrm>
           <a:prstGeom prst="line">
             <a:avLst/>
@@ -8386,8 +8386,8 @@
         </p:nvSpPr>
         <p:spPr>
           <a:xfrm>
-            <a:off x="7484364" y="1492504"/>
-            <a:ext cx="3011119" cy="264160"/>
+            <a:off x="7484364" y="2119224"/>
+            <a:ext cx="3332577" cy="264160"/>
           </a:xfrm>
           <a:prstGeom prst="rect">
             <a:avLst/>
@@ -8425,8 +8425,8 @@
         </p:nvSpPr>
         <p:spPr>
           <a:xfrm>
-            <a:off x="7210044" y="1976120"/>
-            <a:ext cx="3931920" cy="365760"/>
+            <a:off x="7210044" y="2602840"/>
+            <a:ext cx="4293108" cy="365760"/>
           </a:xfrm>
           <a:prstGeom prst="rect">
             <a:avLst/>
@@ -14379,7 +14379,7 @@
         </p:nvSpPr>
         <p:spPr>
           <a:xfrm>
-            <a:off x="548640" y="2459736"/>
+            <a:off x="548640" y="2734056"/>
             <a:ext cx="566928" cy="566928"/>
           </a:xfrm>
           <a:prstGeom prst="roundRect">
@@ -14426,8 +14426,8 @@
         </p:nvSpPr>
         <p:spPr>
           <a:xfrm>
-            <a:off x="1344168" y="2042160"/>
-            <a:ext cx="701040" cy="701040"/>
+            <a:off x="1344168" y="2103120"/>
+            <a:ext cx="914400" cy="914400"/>
           </a:xfrm>
           <a:prstGeom prst="rect">
             <a:avLst/>
@@ -14451,8 +14451,8 @@
         </p:nvSpPr>
         <p:spPr>
           <a:xfrm>
-            <a:off x="2045208" y="2042160"/>
-            <a:ext cx="701040" cy="701040"/>
+            <a:off x="2258568" y="2103120"/>
+            <a:ext cx="914400" cy="914400"/>
           </a:xfrm>
           <a:prstGeom prst="rect">
             <a:avLst/>
@@ -14476,8 +14476,8 @@
         </p:nvSpPr>
         <p:spPr>
           <a:xfrm>
-            <a:off x="2746248" y="2042160"/>
-            <a:ext cx="701040" cy="701040"/>
+            <a:off x="3172968" y="2103120"/>
+            <a:ext cx="914400" cy="914400"/>
           </a:xfrm>
           <a:prstGeom prst="rect">
             <a:avLst/>
@@ -14501,8 +14501,8 @@
         </p:nvSpPr>
         <p:spPr>
           <a:xfrm>
-            <a:off x="3447288" y="2042160"/>
-            <a:ext cx="701040" cy="701040"/>
+            <a:off x="4087368" y="2103120"/>
+            <a:ext cx="914400" cy="914400"/>
           </a:xfrm>
           <a:prstGeom prst="rect">
             <a:avLst/>
@@ -14526,8 +14526,8 @@
         </p:nvSpPr>
         <p:spPr>
           <a:xfrm>
-            <a:off x="4148328" y="2042160"/>
-            <a:ext cx="701040" cy="701040"/>
+            <a:off x="5001768" y="2103120"/>
+            <a:ext cx="914400" cy="914400"/>
           </a:xfrm>
           <a:prstGeom prst="rect">
             <a:avLst/>
@@ -14551,8 +14551,8 @@
         </p:nvSpPr>
         <p:spPr>
           <a:xfrm>
-            <a:off x="4849368" y="2042160"/>
-            <a:ext cx="701040" cy="701040"/>
+            <a:off x="5916168" y="2103120"/>
+            <a:ext cx="914400" cy="914400"/>
           </a:xfrm>
           <a:prstGeom prst="rect">
             <a:avLst/>
@@ -14576,8 +14576,8 @@
         </p:nvSpPr>
         <p:spPr>
           <a:xfrm>
-            <a:off x="1344168" y="2743200"/>
-            <a:ext cx="701040" cy="701040"/>
+            <a:off x="1344168" y="3017520"/>
+            <a:ext cx="914400" cy="914400"/>
           </a:xfrm>
           <a:prstGeom prst="rect">
             <a:avLst/>
@@ -14601,8 +14601,8 @@
         </p:nvSpPr>
         <p:spPr>
           <a:xfrm>
-            <a:off x="2045208" y="2743200"/>
-            <a:ext cx="701040" cy="701040"/>
+            <a:off x="2258568" y="3017520"/>
+            <a:ext cx="914400" cy="914400"/>
           </a:xfrm>
           <a:prstGeom prst="rect">
             <a:avLst/>
@@ -14626,8 +14626,8 @@
         </p:nvSpPr>
         <p:spPr>
           <a:xfrm>
-            <a:off x="2746248" y="2743200"/>
-            <a:ext cx="701040" cy="701040"/>
+            <a:off x="3172968" y="3017520"/>
+            <a:ext cx="914400" cy="914400"/>
           </a:xfrm>
           <a:prstGeom prst="rect">
             <a:avLst/>
@@ -14651,8 +14651,8 @@
         </p:nvSpPr>
         <p:spPr>
           <a:xfrm>
-            <a:off x="3447288" y="2743200"/>
-            <a:ext cx="701040" cy="701040"/>
+            <a:off x="4087368" y="3017520"/>
+            <a:ext cx="914400" cy="914400"/>
           </a:xfrm>
           <a:prstGeom prst="rect">
             <a:avLst/>
@@ -14676,8 +14676,8 @@
         </p:nvSpPr>
         <p:spPr>
           <a:xfrm>
-            <a:off x="4148328" y="2743200"/>
-            <a:ext cx="701040" cy="701040"/>
+            <a:off x="5001768" y="3017520"/>
+            <a:ext cx="914400" cy="914400"/>
           </a:xfrm>
           <a:prstGeom prst="rect">
             <a:avLst/>
@@ -14701,8 +14701,8 @@
         </p:nvSpPr>
         <p:spPr>
           <a:xfrm>
-            <a:off x="4849368" y="2743200"/>
-            <a:ext cx="701040" cy="701040"/>
+            <a:off x="5916168" y="3017520"/>
+            <a:ext cx="914400" cy="914400"/>
           </a:xfrm>
           <a:prstGeom prst="rect">
             <a:avLst/>
@@ -14726,8 +14726,8 @@
         </p:nvSpPr>
         <p:spPr>
           <a:xfrm>
-            <a:off x="1344168" y="2042160"/>
-            <a:ext cx="4206240" cy="1402080"/>
+            <a:off x="1344168" y="2103120"/>
+            <a:ext cx="5486400" cy="1828800"/>
           </a:xfrm>
           <a:prstGeom prst="rect">
             <a:avLst/>
@@ -19206,7 +19206,7 @@
         </p:nvSpPr>
         <p:spPr>
           <a:xfrm>
-            <a:off x="548640" y="1773936"/>
+            <a:off x="548640" y="1945386"/>
             <a:ext cx="566928" cy="566928"/>
           </a:xfrm>
           <a:prstGeom prst="roundRect">
@@ -19253,8 +19253,8 @@
         </p:nvSpPr>
         <p:spPr>
           <a:xfrm>
-            <a:off x="1481328" y="2159000"/>
-            <a:ext cx="3931920" cy="0"/>
+            <a:off x="1481328" y="2445563"/>
+            <a:ext cx="4293108" cy="0"/>
           </a:xfrm>
           <a:prstGeom prst="line">
             <a:avLst/>
@@ -19278,7 +19278,7 @@
         </p:nvSpPr>
         <p:spPr>
           <a:xfrm>
-            <a:off x="1755648" y="2012696"/>
+            <a:off x="1755648" y="2299259"/>
             <a:ext cx="0" cy="292608"/>
           </a:xfrm>
           <a:prstGeom prst="line">
@@ -19301,7 +19301,7 @@
         </p:nvSpPr>
         <p:spPr>
           <a:xfrm>
-            <a:off x="1298448" y="2341880"/>
+            <a:off x="1298448" y="2628443"/>
             <a:ext cx="914400" cy="264160"/>
           </a:xfrm>
           <a:prstGeom prst="rect">
@@ -19340,7 +19340,7 @@
         </p:nvSpPr>
         <p:spPr>
           <a:xfrm>
-            <a:off x="2093976" y="2012696"/>
+            <a:off x="2130095" y="2299259"/>
             <a:ext cx="0" cy="292608"/>
           </a:xfrm>
           <a:prstGeom prst="line">
@@ -19363,7 +19363,7 @@
         </p:nvSpPr>
         <p:spPr>
           <a:xfrm>
-            <a:off x="1636776" y="2341880"/>
+            <a:off x="1672895" y="2628443"/>
             <a:ext cx="914400" cy="264160"/>
           </a:xfrm>
           <a:prstGeom prst="rect">
@@ -19402,7 +19402,7 @@
         </p:nvSpPr>
         <p:spPr>
           <a:xfrm>
-            <a:off x="2432304" y="2012696"/>
+            <a:off x="2504542" y="2299259"/>
             <a:ext cx="0" cy="292608"/>
           </a:xfrm>
           <a:prstGeom prst="line">
@@ -19425,7 +19425,7 @@
         </p:nvSpPr>
         <p:spPr>
           <a:xfrm>
-            <a:off x="1975104" y="2341880"/>
+            <a:off x="2047342" y="2628443"/>
             <a:ext cx="914400" cy="264160"/>
           </a:xfrm>
           <a:prstGeom prst="rect">
@@ -19464,7 +19464,7 @@
         </p:nvSpPr>
         <p:spPr>
           <a:xfrm>
-            <a:off x="2770632" y="2012696"/>
+            <a:off x="2878988" y="2299259"/>
             <a:ext cx="0" cy="292608"/>
           </a:xfrm>
           <a:prstGeom prst="line">
@@ -19487,7 +19487,7 @@
         </p:nvSpPr>
         <p:spPr>
           <a:xfrm>
-            <a:off x="2313432" y="2341880"/>
+            <a:off x="2421788" y="2628443"/>
             <a:ext cx="914400" cy="264160"/>
           </a:xfrm>
           <a:prstGeom prst="rect">
@@ -19526,7 +19526,7 @@
         </p:nvSpPr>
         <p:spPr>
           <a:xfrm>
-            <a:off x="3108960" y="2012696"/>
+            <a:off x="3253435" y="2299259"/>
             <a:ext cx="0" cy="292608"/>
           </a:xfrm>
           <a:prstGeom prst="line">
@@ -19549,7 +19549,7 @@
         </p:nvSpPr>
         <p:spPr>
           <a:xfrm>
-            <a:off x="2651760" y="2341880"/>
+            <a:off x="2796235" y="2628443"/>
             <a:ext cx="914400" cy="264160"/>
           </a:xfrm>
           <a:prstGeom prst="rect">
@@ -19588,7 +19588,7 @@
         </p:nvSpPr>
         <p:spPr>
           <a:xfrm>
-            <a:off x="3447288" y="2012696"/>
+            <a:off x="3627882" y="2299259"/>
             <a:ext cx="0" cy="292608"/>
           </a:xfrm>
           <a:prstGeom prst="line">
@@ -19611,7 +19611,7 @@
         </p:nvSpPr>
         <p:spPr>
           <a:xfrm>
-            <a:off x="2990088" y="2341880"/>
+            <a:off x="3170682" y="2628443"/>
             <a:ext cx="914400" cy="264160"/>
           </a:xfrm>
           <a:prstGeom prst="rect">
@@ -19650,7 +19650,7 @@
         </p:nvSpPr>
         <p:spPr>
           <a:xfrm>
-            <a:off x="3785616" y="2012696"/>
+            <a:off x="4002329" y="2299259"/>
             <a:ext cx="0" cy="292608"/>
           </a:xfrm>
           <a:prstGeom prst="line">
@@ -19673,7 +19673,7 @@
         </p:nvSpPr>
         <p:spPr>
           <a:xfrm>
-            <a:off x="3328416" y="2341880"/>
+            <a:off x="3545129" y="2628443"/>
             <a:ext cx="914400" cy="264160"/>
           </a:xfrm>
           <a:prstGeom prst="rect">
@@ -19712,7 +19712,7 @@
         </p:nvSpPr>
         <p:spPr>
           <a:xfrm>
-            <a:off x="4123944" y="2012696"/>
+            <a:off x="4376776" y="2299259"/>
             <a:ext cx="0" cy="292608"/>
           </a:xfrm>
           <a:prstGeom prst="line">
@@ -19735,7 +19735,7 @@
         </p:nvSpPr>
         <p:spPr>
           <a:xfrm>
-            <a:off x="3666744" y="2341880"/>
+            <a:off x="3919576" y="2628443"/>
             <a:ext cx="914400" cy="264160"/>
           </a:xfrm>
           <a:prstGeom prst="rect">
@@ -19774,7 +19774,7 @@
         </p:nvSpPr>
         <p:spPr>
           <a:xfrm>
-            <a:off x="4462272" y="2012696"/>
+            <a:off x="4751222" y="2299259"/>
             <a:ext cx="0" cy="292608"/>
           </a:xfrm>
           <a:prstGeom prst="line">
@@ -19797,7 +19797,7 @@
         </p:nvSpPr>
         <p:spPr>
           <a:xfrm>
-            <a:off x="4005072" y="2341880"/>
+            <a:off x="4294022" y="2628443"/>
             <a:ext cx="914400" cy="264160"/>
           </a:xfrm>
           <a:prstGeom prst="rect">
@@ -19836,7 +19836,7 @@
         </p:nvSpPr>
         <p:spPr>
           <a:xfrm>
-            <a:off x="4800600" y="2012696"/>
+            <a:off x="5125669" y="2299259"/>
             <a:ext cx="0" cy="292608"/>
           </a:xfrm>
           <a:prstGeom prst="line">
@@ -19859,7 +19859,7 @@
         </p:nvSpPr>
         <p:spPr>
           <a:xfrm>
-            <a:off x="4343400" y="2341880"/>
+            <a:off x="4668469" y="2628443"/>
             <a:ext cx="914400" cy="264160"/>
           </a:xfrm>
           <a:prstGeom prst="rect">
@@ -19898,7 +19898,7 @@
         </p:nvSpPr>
         <p:spPr>
           <a:xfrm>
-            <a:off x="5138928" y="2012696"/>
+            <a:off x="5500116" y="2299259"/>
             <a:ext cx="0" cy="292608"/>
           </a:xfrm>
           <a:prstGeom prst="line">
@@ -19921,7 +19921,7 @@
         </p:nvSpPr>
         <p:spPr>
           <a:xfrm>
-            <a:off x="4681728" y="2341880"/>
+            <a:off x="5042916" y="2628443"/>
             <a:ext cx="914400" cy="264160"/>
           </a:xfrm>
           <a:prstGeom prst="rect">
@@ -19960,7 +19960,7 @@
         </p:nvSpPr>
         <p:spPr>
           <a:xfrm>
-            <a:off x="1664208" y="2067560"/>
+            <a:off x="1664208" y="2354123"/>
             <a:ext cx="182880" cy="182880"/>
           </a:xfrm>
           <a:prstGeom prst="ellipse">
@@ -19985,7 +19985,7 @@
         </p:nvSpPr>
         <p:spPr>
           <a:xfrm>
-            <a:off x="2679192" y="2067560"/>
+            <a:off x="2787548" y="2354123"/>
             <a:ext cx="182880" cy="182880"/>
           </a:xfrm>
           <a:prstGeom prst="ellipse">
@@ -20010,7 +20010,7 @@
         </p:nvSpPr>
         <p:spPr>
           <a:xfrm flipV="1">
-            <a:off x="1755648" y="1774952"/>
+            <a:off x="1755648" y="2061515"/>
             <a:ext cx="0" cy="338328"/>
           </a:xfrm>
           <a:prstGeom prst="line">
@@ -20033,8 +20033,8 @@
         </p:nvSpPr>
         <p:spPr>
           <a:xfrm>
-            <a:off x="1755648" y="1774952"/>
-            <a:ext cx="1014984" cy="0"/>
+            <a:off x="1755648" y="2061515"/>
+            <a:ext cx="1123340" cy="0"/>
           </a:xfrm>
           <a:prstGeom prst="line">
             <a:avLst/>
@@ -20057,8 +20057,8 @@
         </p:nvSpPr>
         <p:spPr>
           <a:xfrm>
-            <a:off x="1755648" y="1492504"/>
-            <a:ext cx="1014984" cy="264160"/>
+            <a:off x="1755648" y="1779067"/>
+            <a:ext cx="1123340" cy="264160"/>
           </a:xfrm>
           <a:prstGeom prst="rect">
             <a:avLst/>
@@ -20096,8 +20096,8 @@
         </p:nvSpPr>
         <p:spPr>
           <a:xfrm>
-            <a:off x="1481328" y="1976120"/>
-            <a:ext cx="3931920" cy="365760"/>
+            <a:off x="1481328" y="2262683"/>
+            <a:ext cx="4293108" cy="365760"/>
           </a:xfrm>
           <a:prstGeom prst="rect">
             <a:avLst/>
@@ -20125,7 +20125,7 @@
         </p:nvSpPr>
         <p:spPr>
           <a:xfrm>
-            <a:off x="6277356" y="1773936"/>
+            <a:off x="6277356" y="1945386"/>
             <a:ext cx="566928" cy="566928"/>
           </a:xfrm>
           <a:prstGeom prst="roundRect">
@@ -20172,8 +20172,8 @@
         </p:nvSpPr>
         <p:spPr>
           <a:xfrm>
-            <a:off x="7210044" y="2159000"/>
-            <a:ext cx="3931920" cy="0"/>
+            <a:off x="7210044" y="2445563"/>
+            <a:ext cx="4293108" cy="0"/>
           </a:xfrm>
           <a:prstGeom prst="line">
             <a:avLst/>
@@ -20197,7 +20197,7 @@
         </p:nvSpPr>
         <p:spPr>
           <a:xfrm>
-            <a:off x="7484364" y="2012696"/>
+            <a:off x="7484364" y="2299259"/>
             <a:ext cx="0" cy="292608"/>
           </a:xfrm>
           <a:prstGeom prst="line">
@@ -20220,7 +20220,7 @@
         </p:nvSpPr>
         <p:spPr>
           <a:xfrm>
-            <a:off x="7027164" y="2341880"/>
+            <a:off x="7027164" y="2628443"/>
             <a:ext cx="914400" cy="264160"/>
           </a:xfrm>
           <a:prstGeom prst="rect">
@@ -20259,7 +20259,7 @@
         </p:nvSpPr>
         <p:spPr>
           <a:xfrm>
-            <a:off x="7822692" y="2012696"/>
+            <a:off x="7858811" y="2299259"/>
             <a:ext cx="0" cy="292608"/>
           </a:xfrm>
           <a:prstGeom prst="line">
@@ -20282,7 +20282,7 @@
         </p:nvSpPr>
         <p:spPr>
           <a:xfrm>
-            <a:off x="7365492" y="2341880"/>
+            <a:off x="7401611" y="2628443"/>
             <a:ext cx="914400" cy="264160"/>
           </a:xfrm>
           <a:prstGeom prst="rect">
@@ -20321,7 +20321,7 @@
         </p:nvSpPr>
         <p:spPr>
           <a:xfrm>
-            <a:off x="8161020" y="2012696"/>
+            <a:off x="8233258" y="2299259"/>
             <a:ext cx="0" cy="292608"/>
           </a:xfrm>
           <a:prstGeom prst="line">
@@ -20344,7 +20344,7 @@
         </p:nvSpPr>
         <p:spPr>
           <a:xfrm>
-            <a:off x="7703820" y="2341880"/>
+            <a:off x="7776058" y="2628443"/>
             <a:ext cx="914400" cy="264160"/>
           </a:xfrm>
           <a:prstGeom prst="rect">
@@ -20383,7 +20383,7 @@
         </p:nvSpPr>
         <p:spPr>
           <a:xfrm>
-            <a:off x="8499348" y="2012696"/>
+            <a:off x="8607704" y="2299259"/>
             <a:ext cx="0" cy="292608"/>
           </a:xfrm>
           <a:prstGeom prst="line">
@@ -20406,7 +20406,7 @@
         </p:nvSpPr>
         <p:spPr>
           <a:xfrm>
-            <a:off x="8042148" y="2341880"/>
+            <a:off x="8150504" y="2628443"/>
             <a:ext cx="914400" cy="264160"/>
           </a:xfrm>
           <a:prstGeom prst="rect">
@@ -20445,7 +20445,7 @@
         </p:nvSpPr>
         <p:spPr>
           <a:xfrm>
-            <a:off x="8837676" y="2012696"/>
+            <a:off x="8982151" y="2299259"/>
             <a:ext cx="0" cy="292608"/>
           </a:xfrm>
           <a:prstGeom prst="line">
@@ -20468,7 +20468,7 @@
         </p:nvSpPr>
         <p:spPr>
           <a:xfrm>
-            <a:off x="8380476" y="2341880"/>
+            <a:off x="8524951" y="2628443"/>
             <a:ext cx="914400" cy="264160"/>
           </a:xfrm>
           <a:prstGeom prst="rect">
@@ -20507,7 +20507,7 @@
         </p:nvSpPr>
         <p:spPr>
           <a:xfrm>
-            <a:off x="9176004" y="2012696"/>
+            <a:off x="9356598" y="2299259"/>
             <a:ext cx="0" cy="292608"/>
           </a:xfrm>
           <a:prstGeom prst="line">
@@ -20530,7 +20530,7 @@
         </p:nvSpPr>
         <p:spPr>
           <a:xfrm>
-            <a:off x="8718804" y="2341880"/>
+            <a:off x="8899398" y="2628443"/>
             <a:ext cx="914400" cy="264160"/>
           </a:xfrm>
           <a:prstGeom prst="rect">
@@ -20569,7 +20569,7 @@
         </p:nvSpPr>
         <p:spPr>
           <a:xfrm>
-            <a:off x="9514332" y="2012696"/>
+            <a:off x="9731045" y="2299259"/>
             <a:ext cx="0" cy="292608"/>
           </a:xfrm>
           <a:prstGeom prst="line">
@@ -20592,7 +20592,7 @@
         </p:nvSpPr>
         <p:spPr>
           <a:xfrm>
-            <a:off x="9057132" y="2341880"/>
+            <a:off x="9273845" y="2628443"/>
             <a:ext cx="914400" cy="264160"/>
           </a:xfrm>
           <a:prstGeom prst="rect">
@@ -20631,7 +20631,7 @@
         </p:nvSpPr>
         <p:spPr>
           <a:xfrm>
-            <a:off x="9852660" y="2012696"/>
+            <a:off x="10105492" y="2299259"/>
             <a:ext cx="0" cy="292608"/>
           </a:xfrm>
           <a:prstGeom prst="line">
@@ -20654,7 +20654,7 @@
         </p:nvSpPr>
         <p:spPr>
           <a:xfrm>
-            <a:off x="9395460" y="2341880"/>
+            <a:off x="9648292" y="2628443"/>
             <a:ext cx="914400" cy="264160"/>
           </a:xfrm>
           <a:prstGeom prst="rect">
@@ -20693,7 +20693,7 @@
         </p:nvSpPr>
         <p:spPr>
           <a:xfrm>
-            <a:off x="10190988" y="2012696"/>
+            <a:off x="10479938" y="2299259"/>
             <a:ext cx="0" cy="292608"/>
           </a:xfrm>
           <a:prstGeom prst="line">
@@ -20716,7 +20716,7 @@
         </p:nvSpPr>
         <p:spPr>
           <a:xfrm>
-            <a:off x="9733788" y="2341880"/>
+            <a:off x="10022738" y="2628443"/>
             <a:ext cx="914400" cy="264160"/>
           </a:xfrm>
           <a:prstGeom prst="rect">
@@ -20755,7 +20755,7 @@
         </p:nvSpPr>
         <p:spPr>
           <a:xfrm>
-            <a:off x="10529316" y="2012696"/>
+            <a:off x="10854385" y="2299259"/>
             <a:ext cx="0" cy="292608"/>
           </a:xfrm>
           <a:prstGeom prst="line">
@@ -20778,7 +20778,7 @@
         </p:nvSpPr>
         <p:spPr>
           <a:xfrm>
-            <a:off x="10072116" y="2341880"/>
+            <a:off x="10397185" y="2628443"/>
             <a:ext cx="914400" cy="264160"/>
           </a:xfrm>
           <a:prstGeom prst="rect">
@@ -20817,7 +20817,7 @@
         </p:nvSpPr>
         <p:spPr>
           <a:xfrm>
-            <a:off x="10867644" y="2012696"/>
+            <a:off x="11228832" y="2299259"/>
             <a:ext cx="0" cy="292608"/>
           </a:xfrm>
           <a:prstGeom prst="line">
@@ -20840,7 +20840,7 @@
         </p:nvSpPr>
         <p:spPr>
           <a:xfrm>
-            <a:off x="10410444" y="2341880"/>
+            <a:off x="10771632" y="2628443"/>
             <a:ext cx="914400" cy="264160"/>
           </a:xfrm>
           <a:prstGeom prst="rect">
@@ -20879,7 +20879,7 @@
         </p:nvSpPr>
         <p:spPr>
           <a:xfrm>
-            <a:off x="7392924" y="2067560"/>
+            <a:off x="7392924" y="2354123"/>
             <a:ext cx="182880" cy="182880"/>
           </a:xfrm>
           <a:prstGeom prst="ellipse">
@@ -20904,7 +20904,7 @@
         </p:nvSpPr>
         <p:spPr>
           <a:xfrm>
-            <a:off x="9761220" y="2067560"/>
+            <a:off x="10014052" y="2354123"/>
             <a:ext cx="182880" cy="182880"/>
           </a:xfrm>
           <a:prstGeom prst="ellipse">
@@ -20929,7 +20929,7 @@
         </p:nvSpPr>
         <p:spPr>
           <a:xfrm flipV="1">
-            <a:off x="7484364" y="1774952"/>
+            <a:off x="7484364" y="2061515"/>
             <a:ext cx="0" cy="338328"/>
           </a:xfrm>
           <a:prstGeom prst="line">
@@ -20952,8 +20952,8 @@
         </p:nvSpPr>
         <p:spPr>
           <a:xfrm>
-            <a:off x="7484364" y="1774952"/>
-            <a:ext cx="2368296" cy="0"/>
+            <a:off x="7484364" y="2061515"/>
+            <a:ext cx="2621128" cy="0"/>
           </a:xfrm>
           <a:prstGeom prst="line">
             <a:avLst/>
@@ -20976,8 +20976,8 @@
         </p:nvSpPr>
         <p:spPr>
           <a:xfrm>
-            <a:off x="7484364" y="1492504"/>
-            <a:ext cx="2368296" cy="264160"/>
+            <a:off x="7484364" y="1779067"/>
+            <a:ext cx="2621128" cy="264160"/>
           </a:xfrm>
           <a:prstGeom prst="rect">
             <a:avLst/>
@@ -21015,8 +21015,8 @@
         </p:nvSpPr>
         <p:spPr>
           <a:xfrm>
-            <a:off x="7210044" y="1976120"/>
-            <a:ext cx="3931920" cy="365760"/>
+            <a:off x="7210044" y="2262683"/>
+            <a:ext cx="4293108" cy="365760"/>
           </a:xfrm>
           <a:prstGeom prst="rect">
             <a:avLst/>
@@ -21044,7 +21044,7 @@
         </p:nvSpPr>
         <p:spPr>
           <a:xfrm>
-            <a:off x="548640" y="3762756"/>
+            <a:off x="548640" y="3934206"/>
             <a:ext cx="566928" cy="566928"/>
           </a:xfrm>
           <a:prstGeom prst="roundRect">
@@ -21091,8 +21091,8 @@
         </p:nvSpPr>
         <p:spPr>
           <a:xfrm>
-            <a:off x="1481328" y="4147820"/>
-            <a:ext cx="3931920" cy="0"/>
+            <a:off x="1481328" y="4434383"/>
+            <a:ext cx="4293108" cy="0"/>
           </a:xfrm>
           <a:prstGeom prst="line">
             <a:avLst/>
@@ -21116,7 +21116,7 @@
         </p:nvSpPr>
         <p:spPr>
           <a:xfrm>
-            <a:off x="1755648" y="4001516"/>
+            <a:off x="1755648" y="4288079"/>
             <a:ext cx="0" cy="292608"/>
           </a:xfrm>
           <a:prstGeom prst="line">
@@ -21139,7 +21139,7 @@
         </p:nvSpPr>
         <p:spPr>
           <a:xfrm>
-            <a:off x="1298448" y="4330700"/>
+            <a:off x="1298448" y="4617263"/>
             <a:ext cx="914400" cy="264160"/>
           </a:xfrm>
           <a:prstGeom prst="rect">
@@ -21178,7 +21178,7 @@
         </p:nvSpPr>
         <p:spPr>
           <a:xfrm>
-            <a:off x="2093976" y="4001516"/>
+            <a:off x="2130095" y="4288079"/>
             <a:ext cx="0" cy="292608"/>
           </a:xfrm>
           <a:prstGeom prst="line">
@@ -21201,7 +21201,7 @@
         </p:nvSpPr>
         <p:spPr>
           <a:xfrm>
-            <a:off x="1636776" y="4330700"/>
+            <a:off x="1672895" y="4617263"/>
             <a:ext cx="914400" cy="264160"/>
           </a:xfrm>
           <a:prstGeom prst="rect">
@@ -21240,7 +21240,7 @@
         </p:nvSpPr>
         <p:spPr>
           <a:xfrm>
-            <a:off x="2432304" y="4001516"/>
+            <a:off x="2504542" y="4288079"/>
             <a:ext cx="0" cy="292608"/>
           </a:xfrm>
           <a:prstGeom prst="line">
@@ -21263,7 +21263,7 @@
         </p:nvSpPr>
         <p:spPr>
           <a:xfrm>
-            <a:off x="1975104" y="4330700"/>
+            <a:off x="2047342" y="4617263"/>
             <a:ext cx="914400" cy="264160"/>
           </a:xfrm>
           <a:prstGeom prst="rect">
@@ -21302,7 +21302,7 @@
         </p:nvSpPr>
         <p:spPr>
           <a:xfrm>
-            <a:off x="2770632" y="4001516"/>
+            <a:off x="2878988" y="4288079"/>
             <a:ext cx="0" cy="292608"/>
           </a:xfrm>
           <a:prstGeom prst="line">
@@ -21325,7 +21325,7 @@
         </p:nvSpPr>
         <p:spPr>
           <a:xfrm>
-            <a:off x="2313432" y="4330700"/>
+            <a:off x="2421788" y="4617263"/>
             <a:ext cx="914400" cy="264160"/>
           </a:xfrm>
           <a:prstGeom prst="rect">
@@ -21364,7 +21364,7 @@
         </p:nvSpPr>
         <p:spPr>
           <a:xfrm>
-            <a:off x="3108960" y="4001516"/>
+            <a:off x="3253435" y="4288079"/>
             <a:ext cx="0" cy="292608"/>
           </a:xfrm>
           <a:prstGeom prst="line">
@@ -21387,7 +21387,7 @@
         </p:nvSpPr>
         <p:spPr>
           <a:xfrm>
-            <a:off x="2651760" y="4330700"/>
+            <a:off x="2796235" y="4617263"/>
             <a:ext cx="914400" cy="264160"/>
           </a:xfrm>
           <a:prstGeom prst="rect">
@@ -21426,7 +21426,7 @@
         </p:nvSpPr>
         <p:spPr>
           <a:xfrm>
-            <a:off x="3447288" y="4001516"/>
+            <a:off x="3627882" y="4288079"/>
             <a:ext cx="0" cy="292608"/>
           </a:xfrm>
           <a:prstGeom prst="line">
@@ -21449,7 +21449,7 @@
         </p:nvSpPr>
         <p:spPr>
           <a:xfrm>
-            <a:off x="2990088" y="4330700"/>
+            <a:off x="3170682" y="4617263"/>
             <a:ext cx="914400" cy="264160"/>
           </a:xfrm>
           <a:prstGeom prst="rect">
@@ -21488,7 +21488,7 @@
         </p:nvSpPr>
         <p:spPr>
           <a:xfrm>
-            <a:off x="3785616" y="4001516"/>
+            <a:off x="4002329" y="4288079"/>
             <a:ext cx="0" cy="292608"/>
           </a:xfrm>
           <a:prstGeom prst="line">
@@ -21511,7 +21511,7 @@
         </p:nvSpPr>
         <p:spPr>
           <a:xfrm>
-            <a:off x="3328416" y="4330700"/>
+            <a:off x="3545129" y="4617263"/>
             <a:ext cx="914400" cy="264160"/>
           </a:xfrm>
           <a:prstGeom prst="rect">
@@ -21550,7 +21550,7 @@
         </p:nvSpPr>
         <p:spPr>
           <a:xfrm>
-            <a:off x="4123944" y="4001516"/>
+            <a:off x="4376776" y="4288079"/>
             <a:ext cx="0" cy="292608"/>
           </a:xfrm>
           <a:prstGeom prst="line">
@@ -21573,7 +21573,7 @@
         </p:nvSpPr>
         <p:spPr>
           <a:xfrm>
-            <a:off x="3666744" y="4330700"/>
+            <a:off x="3919576" y="4617263"/>
             <a:ext cx="914400" cy="264160"/>
           </a:xfrm>
           <a:prstGeom prst="rect">
@@ -21612,7 +21612,7 @@
         </p:nvSpPr>
         <p:spPr>
           <a:xfrm>
-            <a:off x="4462272" y="4001516"/>
+            <a:off x="4751222" y="4288079"/>
             <a:ext cx="0" cy="292608"/>
           </a:xfrm>
           <a:prstGeom prst="line">
@@ -21635,7 +21635,7 @@
         </p:nvSpPr>
         <p:spPr>
           <a:xfrm>
-            <a:off x="4005072" y="4330700"/>
+            <a:off x="4294022" y="4617263"/>
             <a:ext cx="914400" cy="264160"/>
           </a:xfrm>
           <a:prstGeom prst="rect">
@@ -21674,7 +21674,7 @@
         </p:nvSpPr>
         <p:spPr>
           <a:xfrm>
-            <a:off x="4800600" y="4001516"/>
+            <a:off x="5125669" y="4288079"/>
             <a:ext cx="0" cy="292608"/>
           </a:xfrm>
           <a:prstGeom prst="line">
@@ -21697,7 +21697,7 @@
         </p:nvSpPr>
         <p:spPr>
           <a:xfrm>
-            <a:off x="4343400" y="4330700"/>
+            <a:off x="4668469" y="4617263"/>
             <a:ext cx="914400" cy="264160"/>
           </a:xfrm>
           <a:prstGeom prst="rect">
@@ -21736,7 +21736,7 @@
         </p:nvSpPr>
         <p:spPr>
           <a:xfrm>
-            <a:off x="5138928" y="4001516"/>
+            <a:off x="5500116" y="4288079"/>
             <a:ext cx="0" cy="292608"/>
           </a:xfrm>
           <a:prstGeom prst="line">
@@ -21759,7 +21759,7 @@
         </p:nvSpPr>
         <p:spPr>
           <a:xfrm>
-            <a:off x="4681728" y="4330700"/>
+            <a:off x="5042916" y="4617263"/>
             <a:ext cx="914400" cy="264160"/>
           </a:xfrm>
           <a:prstGeom prst="rect">
@@ -21798,7 +21798,7 @@
         </p:nvSpPr>
         <p:spPr>
           <a:xfrm>
-            <a:off x="2002536" y="4056380"/>
+            <a:off x="2038655" y="4342943"/>
             <a:ext cx="182880" cy="182880"/>
           </a:xfrm>
           <a:prstGeom prst="ellipse">
@@ -21823,7 +21823,7 @@
         </p:nvSpPr>
         <p:spPr>
           <a:xfrm>
-            <a:off x="3355848" y="4056380"/>
+            <a:off x="3536442" y="4342943"/>
             <a:ext cx="182880" cy="182880"/>
           </a:xfrm>
           <a:prstGeom prst="ellipse">
@@ -21848,7 +21848,7 @@
         </p:nvSpPr>
         <p:spPr>
           <a:xfrm flipV="1">
-            <a:off x="2093976" y="3763772"/>
+            <a:off x="2130095" y="4050335"/>
             <a:ext cx="0" cy="338328"/>
           </a:xfrm>
           <a:prstGeom prst="line">
@@ -21871,8 +21871,8 @@
         </p:nvSpPr>
         <p:spPr>
           <a:xfrm>
-            <a:off x="2093976" y="3763772"/>
-            <a:ext cx="1353312" cy="0"/>
+            <a:off x="2130095" y="4050335"/>
+            <a:ext cx="1497787" cy="0"/>
           </a:xfrm>
           <a:prstGeom prst="line">
             <a:avLst/>
@@ -21895,8 +21895,8 @@
         </p:nvSpPr>
         <p:spPr>
           <a:xfrm>
-            <a:off x="2093976" y="3481324"/>
-            <a:ext cx="1353312" cy="264160"/>
+            <a:off x="2130095" y="3767887"/>
+            <a:ext cx="1497787" cy="264160"/>
           </a:xfrm>
           <a:prstGeom prst="rect">
             <a:avLst/>
@@ -21934,8 +21934,8 @@
         </p:nvSpPr>
         <p:spPr>
           <a:xfrm>
-            <a:off x="1481328" y="3964940"/>
-            <a:ext cx="3931920" cy="365760"/>
+            <a:off x="1481328" y="4251503"/>
+            <a:ext cx="4293108" cy="365760"/>
           </a:xfrm>
           <a:prstGeom prst="rect">
             <a:avLst/>
@@ -21963,7 +21963,7 @@
         </p:nvSpPr>
         <p:spPr>
           <a:xfrm>
-            <a:off x="6277356" y="3762756"/>
+            <a:off x="6277356" y="3934206"/>
             <a:ext cx="566928" cy="566928"/>
           </a:xfrm>
           <a:prstGeom prst="roundRect">
@@ -22010,8 +22010,8 @@
         </p:nvSpPr>
         <p:spPr>
           <a:xfrm>
-            <a:off x="7210044" y="4147820"/>
-            <a:ext cx="3931920" cy="0"/>
+            <a:off x="7210044" y="4434383"/>
+            <a:ext cx="4293108" cy="0"/>
           </a:xfrm>
           <a:prstGeom prst="line">
             <a:avLst/>
@@ -22035,7 +22035,7 @@
         </p:nvSpPr>
         <p:spPr>
           <a:xfrm>
-            <a:off x="7484364" y="4001516"/>
+            <a:off x="7484364" y="4288079"/>
             <a:ext cx="0" cy="292608"/>
           </a:xfrm>
           <a:prstGeom prst="line">
@@ -22058,7 +22058,7 @@
         </p:nvSpPr>
         <p:spPr>
           <a:xfrm>
-            <a:off x="7027164" y="4330700"/>
+            <a:off x="7027164" y="4617263"/>
             <a:ext cx="914400" cy="264160"/>
           </a:xfrm>
           <a:prstGeom prst="rect">
@@ -22097,7 +22097,7 @@
         </p:nvSpPr>
         <p:spPr>
           <a:xfrm>
-            <a:off x="7822692" y="4001516"/>
+            <a:off x="7858811" y="4288079"/>
             <a:ext cx="0" cy="292608"/>
           </a:xfrm>
           <a:prstGeom prst="line">
@@ -22120,7 +22120,7 @@
         </p:nvSpPr>
         <p:spPr>
           <a:xfrm>
-            <a:off x="7365492" y="4330700"/>
+            <a:off x="7401611" y="4617263"/>
             <a:ext cx="914400" cy="264160"/>
           </a:xfrm>
           <a:prstGeom prst="rect">
@@ -22159,7 +22159,7 @@
         </p:nvSpPr>
         <p:spPr>
           <a:xfrm>
-            <a:off x="8161020" y="4001516"/>
+            <a:off x="8233258" y="4288079"/>
             <a:ext cx="0" cy="292608"/>
           </a:xfrm>
           <a:prstGeom prst="line">
@@ -22182,7 +22182,7 @@
         </p:nvSpPr>
         <p:spPr>
           <a:xfrm>
-            <a:off x="7703820" y="4330700"/>
+            <a:off x="7776058" y="4617263"/>
             <a:ext cx="914400" cy="264160"/>
           </a:xfrm>
           <a:prstGeom prst="rect">
@@ -22221,7 +22221,7 @@
         </p:nvSpPr>
         <p:spPr>
           <a:xfrm>
-            <a:off x="8499348" y="4001516"/>
+            <a:off x="8607704" y="4288079"/>
             <a:ext cx="0" cy="292608"/>
           </a:xfrm>
           <a:prstGeom prst="line">
@@ -22244,7 +22244,7 @@
         </p:nvSpPr>
         <p:spPr>
           <a:xfrm>
-            <a:off x="8042148" y="4330700"/>
+            <a:off x="8150504" y="4617263"/>
             <a:ext cx="914400" cy="264160"/>
           </a:xfrm>
           <a:prstGeom prst="rect">
@@ -22283,7 +22283,7 @@
         </p:nvSpPr>
         <p:spPr>
           <a:xfrm>
-            <a:off x="8837676" y="4001516"/>
+            <a:off x="8982151" y="4288079"/>
             <a:ext cx="0" cy="292608"/>
           </a:xfrm>
           <a:prstGeom prst="line">
@@ -22306,7 +22306,7 @@
         </p:nvSpPr>
         <p:spPr>
           <a:xfrm>
-            <a:off x="8380476" y="4330700"/>
+            <a:off x="8524951" y="4617263"/>
             <a:ext cx="914400" cy="264160"/>
           </a:xfrm>
           <a:prstGeom prst="rect">
@@ -22345,7 +22345,7 @@
         </p:nvSpPr>
         <p:spPr>
           <a:xfrm>
-            <a:off x="9176004" y="4001516"/>
+            <a:off x="9356598" y="4288079"/>
             <a:ext cx="0" cy="292608"/>
           </a:xfrm>
           <a:prstGeom prst="line">
@@ -22368,7 +22368,7 @@
         </p:nvSpPr>
         <p:spPr>
           <a:xfrm>
-            <a:off x="8718804" y="4330700"/>
+            <a:off x="8899398" y="4617263"/>
             <a:ext cx="914400" cy="264160"/>
           </a:xfrm>
           <a:prstGeom prst="rect">
@@ -22407,7 +22407,7 @@
         </p:nvSpPr>
         <p:spPr>
           <a:xfrm>
-            <a:off x="9514332" y="4001516"/>
+            <a:off x="9731045" y="4288079"/>
             <a:ext cx="0" cy="292608"/>
           </a:xfrm>
           <a:prstGeom prst="line">
@@ -22430,7 +22430,7 @@
         </p:nvSpPr>
         <p:spPr>
           <a:xfrm>
-            <a:off x="9057132" y="4330700"/>
+            <a:off x="9273845" y="4617263"/>
             <a:ext cx="914400" cy="264160"/>
           </a:xfrm>
           <a:prstGeom prst="rect">
@@ -22469,7 +22469,7 @@
         </p:nvSpPr>
         <p:spPr>
           <a:xfrm>
-            <a:off x="9852660" y="4001516"/>
+            <a:off x="10105492" y="4288079"/>
             <a:ext cx="0" cy="292608"/>
           </a:xfrm>
           <a:prstGeom prst="line">
@@ -22492,7 +22492,7 @@
         </p:nvSpPr>
         <p:spPr>
           <a:xfrm>
-            <a:off x="9395460" y="4330700"/>
+            <a:off x="9648292" y="4617263"/>
             <a:ext cx="914400" cy="264160"/>
           </a:xfrm>
           <a:prstGeom prst="rect">
@@ -22531,7 +22531,7 @@
         </p:nvSpPr>
         <p:spPr>
           <a:xfrm>
-            <a:off x="10190988" y="4001516"/>
+            <a:off x="10479938" y="4288079"/>
             <a:ext cx="0" cy="292608"/>
           </a:xfrm>
           <a:prstGeom prst="line">
@@ -22554,7 +22554,7 @@
         </p:nvSpPr>
         <p:spPr>
           <a:xfrm>
-            <a:off x="9733788" y="4330700"/>
+            <a:off x="10022738" y="4617263"/>
             <a:ext cx="914400" cy="264160"/>
           </a:xfrm>
           <a:prstGeom prst="rect">
@@ -22593,7 +22593,7 @@
         </p:nvSpPr>
         <p:spPr>
           <a:xfrm>
-            <a:off x="10529316" y="4001516"/>
+            <a:off x="10854385" y="4288079"/>
             <a:ext cx="0" cy="292608"/>
           </a:xfrm>
           <a:prstGeom prst="line">
@@ -22616,7 +22616,7 @@
         </p:nvSpPr>
         <p:spPr>
           <a:xfrm>
-            <a:off x="10072116" y="4330700"/>
+            <a:off x="10397185" y="4617263"/>
             <a:ext cx="914400" cy="264160"/>
           </a:xfrm>
           <a:prstGeom prst="rect">
@@ -22655,7 +22655,7 @@
         </p:nvSpPr>
         <p:spPr>
           <a:xfrm>
-            <a:off x="10867644" y="4001516"/>
+            <a:off x="11228832" y="4288079"/>
             <a:ext cx="0" cy="292608"/>
           </a:xfrm>
           <a:prstGeom prst="line">
@@ -22678,7 +22678,7 @@
         </p:nvSpPr>
         <p:spPr>
           <a:xfrm>
-            <a:off x="10410444" y="4330700"/>
+            <a:off x="10771632" y="4617263"/>
             <a:ext cx="914400" cy="264160"/>
           </a:xfrm>
           <a:prstGeom prst="rect">
@@ -22717,7 +22717,7 @@
         </p:nvSpPr>
         <p:spPr>
           <a:xfrm>
-            <a:off x="8407908" y="4056380"/>
+            <a:off x="8516264" y="4342943"/>
             <a:ext cx="182880" cy="182880"/>
           </a:xfrm>
           <a:prstGeom prst="ellipse">
@@ -22742,7 +22742,7 @@
         </p:nvSpPr>
         <p:spPr>
           <a:xfrm>
-            <a:off x="10437876" y="4056380"/>
+            <a:off x="10762945" y="4342943"/>
             <a:ext cx="182880" cy="182880"/>
           </a:xfrm>
           <a:prstGeom prst="ellipse">
@@ -22767,7 +22767,7 @@
         </p:nvSpPr>
         <p:spPr>
           <a:xfrm flipV="1">
-            <a:off x="8499348" y="3763772"/>
+            <a:off x="8607704" y="4050335"/>
             <a:ext cx="0" cy="338328"/>
           </a:xfrm>
           <a:prstGeom prst="line">
@@ -22790,8 +22790,8 @@
         </p:nvSpPr>
         <p:spPr>
           <a:xfrm>
-            <a:off x="8499348" y="3763772"/>
-            <a:ext cx="2029968" cy="0"/>
+            <a:off x="8607704" y="4050335"/>
+            <a:ext cx="2246681" cy="0"/>
           </a:xfrm>
           <a:prstGeom prst="line">
             <a:avLst/>
@@ -22814,8 +22814,8 @@
         </p:nvSpPr>
         <p:spPr>
           <a:xfrm>
-            <a:off x="8499348" y="3481324"/>
-            <a:ext cx="2029968" cy="264160"/>
+            <a:off x="8607704" y="3767887"/>
+            <a:ext cx="2246681" cy="264160"/>
           </a:xfrm>
           <a:prstGeom prst="rect">
             <a:avLst/>
@@ -22853,8 +22853,8 @@
         </p:nvSpPr>
         <p:spPr>
           <a:xfrm>
-            <a:off x="7210044" y="3964940"/>
-            <a:ext cx="3931920" cy="365760"/>
+            <a:off x="7210044" y="4251503"/>
+            <a:ext cx="4293108" cy="365760"/>
           </a:xfrm>
           <a:prstGeom prst="rect">
             <a:avLst/>

--- a/dist/초2/수학/도형과측정/초2_수학_도형과측정_03_길이재기.pptx
+++ b/dist/초2/수학/도형과측정/초2_수학_도형과측정_03_길이재기.pptx
@@ -122,13 +122,13 @@
   <p:extLst>
     <p:ext uri="{521415D9-36F7-43E2-AB2F-B90AF26B5E84}">
       <p14:sectionLst xmlns:p14="http://schemas.microsoft.com/office/powerpoint/2010/main">
-        <p14:section name="도입" id="{ce98bdc2-8c75-72c3-82bb-e23c9c3ff663}">
+        <p14:section name="도입" id="{67556030-81ef-3a8c-f276-edbace132724}">
           <p14:sldIdLst>
             <p14:sldId id="256"/>
             <p14:sldId id="257"/>
           </p14:sldIdLst>
         </p14:section>
-        <p14:section name="개념" id="{67367c03-d018-b96f-6a39-4aa2bbb8946c}">
+        <p14:section name="개념" id="{b0e52849-6d61-dfef-62d1-d2c1d71f6120}">
           <p14:sldIdLst>
             <p14:sldId id="258"/>
             <p14:sldId id="259"/>
@@ -138,32 +138,32 @@
             <p14:sldId id="265"/>
           </p14:sldIdLst>
         </p14:section>
-        <p14:section name="연습" id="{c948ceca-d39d-0bcc-9b84-6562e7361cd6}">
+        <p14:section name="연습" id="{25eaaa09-dc6a-8f3a-51cd-ce9c9ce024dc}">
           <p14:sldIdLst>
             <p14:sldId id="262"/>
             <p14:sldId id="263"/>
             <p14:sldId id="266"/>
           </p14:sldIdLst>
         </p14:section>
-        <p14:section name="개념" id="{deccc6b7-b706-71a0-6bc0-b37fa839ff8e}">
+        <p14:section name="개념" id="{7679bedc-5715-8140-f4ae-08407ccdced3}">
           <p14:sldIdLst/>
         </p14:section>
-        <p14:section name="연습" id="{37d80f2c-b18c-1ecc-7ce6-96baf2529817}">
+        <p14:section name="연습" id="{ce4abc99-0721-3997-242c-49040acbfef8}">
           <p14:sldIdLst/>
         </p14:section>
-        <p14:section name="확인" id="{321e7411-33ee-b241-b8de-baf29ba1e5b1}">
+        <p14:section name="확인" id="{f179909b-fc95-3259-f4f6-78e8b3addd29}">
           <p14:sldIdLst>
             <p14:sldId id="267"/>
             <p14:sldId id="268"/>
             <p14:sldId id="269"/>
           </p14:sldIdLst>
         </p14:section>
-        <p14:section name="정리" id="{2bbdaf10-db20-0a1c-992f-5a4e39efcf01}">
+        <p14:section name="정리" id="{fd753563-2081-e151-b65c-7f6be0848941}">
           <p14:sldIdLst>
             <p14:sldId id="270"/>
           </p14:sldIdLst>
         </p14:section>
-        <p14:section name="보충" id="{3bbcac1b-ce23-0624-5fbb-26696126b191}">
+        <p14:section name="보충" id="{41057fed-c0fd-09d7-f319-24c4bae0a379}">
           <p14:sldIdLst>
             <p14:sldId id="271"/>
           </p14:sldIdLst>
@@ -8873,7 +8873,7 @@
               <a:buNone/>
             </a:pPr>
             <a:r>
-              <a:rPr lang="ko-KR" altLang="en-US" sz="3200" dirty="0">
+              <a:rPr lang="en-US" altLang="ko-KR" sz="3200" dirty="0">
                 <a:solidFill>
                   <a:srgbClr val="1F2937"/>
                 </a:solidFill>
@@ -9154,7 +9154,7 @@
               <a:buNone/>
             </a:pPr>
             <a:r>
-              <a:rPr lang="ko-KR" altLang="en-US" sz="3200" dirty="0">
+              <a:rPr lang="en-US" altLang="ko-KR" sz="3200" dirty="0">
                 <a:solidFill>
                   <a:srgbClr val="1F2937"/>
                 </a:solidFill>
@@ -9232,7 +9232,7 @@
               <a:buNone/>
             </a:pPr>
             <a:r>
-              <a:rPr lang="ko-KR" altLang="en-US" sz="3200" dirty="0">
+              <a:rPr lang="en-US" altLang="ko-KR" sz="3200" dirty="0">
                 <a:solidFill>
                   <a:srgbClr val="1F2937"/>
                 </a:solidFill>
@@ -16065,7 +16065,7 @@
               <a:buNone/>
             </a:pPr>
             <a:r>
-              <a:rPr lang="ko-KR" altLang="en-US" sz="2600" b="1" dirty="0">
+              <a:rPr lang="en-US" altLang="ko-KR" sz="2600" b="1" dirty="0">
                 <a:solidFill>
                   <a:srgbClr val="3D5A80"/>
                 </a:solidFill>
@@ -16151,7 +16151,7 @@
               <a:buNone/>
             </a:pPr>
             <a:r>
-              <a:rPr lang="ko-KR" altLang="en-US" sz="2600" b="1" dirty="0">
+              <a:rPr lang="en-US" altLang="ko-KR" sz="2600" b="1" dirty="0">
                 <a:solidFill>
                   <a:srgbClr val="3D5A80"/>
                 </a:solidFill>
@@ -16237,7 +16237,7 @@
               <a:buNone/>
             </a:pPr>
             <a:r>
-              <a:rPr lang="ko-KR" altLang="en-US" sz="2600" b="1" dirty="0">
+              <a:rPr lang="en-US" altLang="ko-KR" sz="2600" b="1" dirty="0">
                 <a:solidFill>
                   <a:srgbClr val="3D5A80"/>
                 </a:solidFill>
